--- a/Conteo de Productos en Anaquel.pptx
+++ b/Conteo de Productos en Anaquel.pptx
@@ -5,7 +5,7 @@
     <p:sldMasterId id="2147483648" r:id="rId1"/>
   </p:sldMasterIdLst>
   <p:notesMasterIdLst>
-    <p:notesMasterId r:id="rId7"/>
+    <p:notesMasterId r:id="rId8"/>
   </p:notesMasterIdLst>
   <p:sldIdLst>
     <p:sldId id="264" r:id="rId2"/>
@@ -13,6 +13,7 @@
     <p:sldId id="262" r:id="rId4"/>
     <p:sldId id="259" r:id="rId5"/>
     <p:sldId id="263" r:id="rId6"/>
+    <p:sldId id="265" r:id="rId7"/>
   </p:sldIdLst>
   <p:sldSz cx="9144000" cy="5143500" type="screen16x9"/>
   <p:notesSz cx="5143500" cy="9144000"/>
@@ -2260,6 +2261,125 @@
     <p:extLst>
       <p:ext uri="{BB962C8B-B14F-4D97-AF65-F5344CB8AC3E}">
         <p14:creationId xmlns:p14="http://schemas.microsoft.com/office/powerpoint/2010/main" val="4157255122"/>
+      </p:ext>
+    </p:extLst>
+  </p:cSld>
+  <p:clrMapOvr>
+    <a:masterClrMapping/>
+  </p:clrMapOvr>
+</p:sld>
+</file>
+
+<file path=ppt/slides/slide6.xml><?xml version="1.0" encoding="utf-8"?>
+<p:sld xmlns:a="http://schemas.openxmlformats.org/drawingml/2006/main" xmlns:r="http://schemas.openxmlformats.org/officeDocument/2006/relationships" xmlns:p="http://schemas.openxmlformats.org/presentationml/2006/main">
+  <p:cSld>
+    <p:spTree>
+      <p:nvGrpSpPr>
+        <p:cNvPr id="1" name="">
+          <a:extLst>
+            <a:ext uri="{FF2B5EF4-FFF2-40B4-BE49-F238E27FC236}">
+              <a16:creationId xmlns:a16="http://schemas.microsoft.com/office/drawing/2014/main" id="{83FD7406-D105-5A5F-C3A6-4FE8F5885CCF}"/>
+            </a:ext>
+          </a:extLst>
+        </p:cNvPr>
+        <p:cNvGrpSpPr/>
+        <p:nvPr/>
+      </p:nvGrpSpPr>
+      <p:grpSpPr>
+        <a:xfrm>
+          <a:off x="0" y="0"/>
+          <a:ext cx="0" cy="0"/>
+          <a:chOff x="0" y="0"/>
+          <a:chExt cx="0" cy="0"/>
+        </a:xfrm>
+      </p:grpSpPr>
+      <p:sp>
+        <p:nvSpPr>
+          <p:cNvPr id="3" name="TextBox 2">
+            <a:extLst>
+              <a:ext uri="{FF2B5EF4-FFF2-40B4-BE49-F238E27FC236}">
+                <a16:creationId xmlns:a16="http://schemas.microsoft.com/office/drawing/2014/main" id="{841C917B-E992-7168-A251-DF2C9D791C99}"/>
+              </a:ext>
+            </a:extLst>
+          </p:cNvPr>
+          <p:cNvSpPr txBox="1"/>
+          <p:nvPr/>
+        </p:nvSpPr>
+        <p:spPr>
+          <a:xfrm>
+            <a:off x="344774" y="1005442"/>
+            <a:ext cx="8252085" cy="369332"/>
+          </a:xfrm>
+          <a:prstGeom prst="rect">
+            <a:avLst/>
+          </a:prstGeom>
+          <a:noFill/>
+        </p:spPr>
+        <p:txBody>
+          <a:bodyPr wrap="square" rtlCol="0">
+            <a:spAutoFit/>
+          </a:bodyPr>
+          <a:lstStyle/>
+          <a:p>
+            <a:r>
+              <a:rPr lang="es-ES" dirty="0"/>
+              <a:t>https://github.com/ConsueloRuiz/PI_ConteoAnaqueles</a:t>
+            </a:r>
+          </a:p>
+        </p:txBody>
+      </p:sp>
+      <p:sp>
+        <p:nvSpPr>
+          <p:cNvPr id="2" name="Shape 0">
+            <a:extLst>
+              <a:ext uri="{FF2B5EF4-FFF2-40B4-BE49-F238E27FC236}">
+                <a16:creationId xmlns:a16="http://schemas.microsoft.com/office/drawing/2014/main" id="{7D6C2118-3B16-E789-B7D6-747F4E9C5BC5}"/>
+              </a:ext>
+            </a:extLst>
+          </p:cNvPr>
+          <p:cNvSpPr/>
+          <p:nvPr/>
+        </p:nvSpPr>
+        <p:spPr>
+          <a:xfrm>
+            <a:off x="0" y="0"/>
+            <a:ext cx="9144000" cy="685800"/>
+          </a:xfrm>
+          <a:prstGeom prst="rect">
+            <a:avLst/>
+          </a:prstGeom>
+          <a:solidFill>
+            <a:srgbClr val="002060"/>
+          </a:solidFill>
+          <a:ln w="12700">
+            <a:noFill/>
+            <a:prstDash val="solid"/>
+          </a:ln>
+        </p:spPr>
+        <p:txBody>
+          <a:bodyPr/>
+          <a:lstStyle/>
+          <a:p>
+            <a:r>
+              <a:rPr lang="es-ES" sz="2800" dirty="0" err="1">
+                <a:solidFill>
+                  <a:schemeClr val="bg1"/>
+                </a:solidFill>
+              </a:rPr>
+              <a:t>Github</a:t>
+            </a:r>
+            <a:endParaRPr lang="es-MX" sz="2800" dirty="0">
+              <a:solidFill>
+                <a:schemeClr val="bg1"/>
+              </a:solidFill>
+            </a:endParaRPr>
+          </a:p>
+        </p:txBody>
+      </p:sp>
+    </p:spTree>
+    <p:extLst>
+      <p:ext uri="{BB962C8B-B14F-4D97-AF65-F5344CB8AC3E}">
+        <p14:creationId xmlns:p14="http://schemas.microsoft.com/office/powerpoint/2010/main" val="496259754"/>
       </p:ext>
     </p:extLst>
   </p:cSld>
